--- a/Figure 2/Figure 2.pptx
+++ b/Figure 2/Figure 2.pptx
@@ -7,7 +7,7 @@
   <p:sldIdLst>
     <p:sldId id="256" r:id="rId3"/>
   </p:sldIdLst>
-  <p:sldSz cx="7559675" cy="5399405"/>
+  <p:sldSz cx="3599815" cy="3419475"/>
   <p:notesSz cx="6858000" cy="9144000"/>
   <p:custDataLst>
     <p:tags r:id="rId7"/>
@@ -139,15 +139,15 @@
         </p:nvSpPr>
         <p:spPr>
           <a:xfrm>
-            <a:off x="946809" y="885260"/>
-            <a:ext cx="5680845" cy="1883208"/>
+            <a:off x="450984" y="560866"/>
+            <a:ext cx="2705902" cy="1193129"/>
           </a:xfrm>
         </p:spPr>
         <p:txBody>
           <a:bodyPr anchor="b"/>
           <a:lstStyle>
             <a:lvl1pPr algn="ctr">
-              <a:defRPr sz="4735"/>
+              <a:defRPr sz="2365"/>
             </a:lvl1pPr>
           </a:lstStyle>
           <a:p>
@@ -171,8 +171,8 @@
         </p:nvSpPr>
         <p:spPr>
           <a:xfrm>
-            <a:off x="946809" y="2841093"/>
-            <a:ext cx="5680845" cy="1305973"/>
+            <a:off x="450984" y="1800007"/>
+            <a:ext cx="2705902" cy="827416"/>
           </a:xfrm>
         </p:spPr>
         <p:txBody>
@@ -180,39 +180,39 @@
           <a:lstStyle>
             <a:lvl1pPr marL="0" indent="0" algn="ctr">
               <a:buNone/>
-              <a:defRPr sz="1895"/>
+              <a:defRPr sz="945"/>
             </a:lvl1pPr>
-            <a:lvl2pPr marL="360680" indent="0" algn="ctr">
-              <a:buNone/>
-              <a:defRPr sz="1585"/>
+            <a:lvl2pPr marL="180340" indent="0" algn="ctr">
+              <a:buNone/>
+              <a:defRPr sz="790"/>
             </a:lvl2pPr>
-            <a:lvl3pPr marL="720090" indent="0" algn="ctr">
-              <a:buNone/>
-              <a:defRPr sz="1425"/>
+            <a:lvl3pPr marL="360045" indent="0" algn="ctr">
+              <a:buNone/>
+              <a:defRPr sz="715"/>
             </a:lvl3pPr>
-            <a:lvl4pPr marL="1081405" indent="0" algn="ctr">
-              <a:buNone/>
-              <a:defRPr sz="1255"/>
+            <a:lvl4pPr marL="540385" indent="0" algn="ctr">
+              <a:buNone/>
+              <a:defRPr sz="630"/>
             </a:lvl4pPr>
-            <a:lvl5pPr marL="1442720" indent="0" algn="ctr">
-              <a:buNone/>
-              <a:defRPr sz="1255"/>
+            <a:lvl5pPr marL="720725" indent="0" algn="ctr">
+              <a:buNone/>
+              <a:defRPr sz="630"/>
             </a:lvl5pPr>
-            <a:lvl6pPr marL="1802765" indent="0" algn="ctr">
-              <a:buNone/>
-              <a:defRPr sz="1255"/>
+            <a:lvl6pPr marL="901700" indent="0" algn="ctr">
+              <a:buNone/>
+              <a:defRPr sz="630"/>
             </a:lvl6pPr>
-            <a:lvl7pPr marL="2160905" indent="0" algn="ctr">
-              <a:buNone/>
-              <a:defRPr sz="1255"/>
+            <a:lvl7pPr marL="1080770" indent="0" algn="ctr">
+              <a:buNone/>
+              <a:defRPr sz="630"/>
             </a:lvl7pPr>
-            <a:lvl8pPr marL="2523490" indent="0" algn="ctr">
-              <a:buNone/>
-              <a:defRPr sz="1255"/>
+            <a:lvl8pPr marL="1261745" indent="0" algn="ctr">
+              <a:buNone/>
+              <a:defRPr sz="630"/>
             </a:lvl8pPr>
-            <a:lvl9pPr marL="2881630" indent="0" algn="ctr">
-              <a:buNone/>
-              <a:defRPr sz="1255"/>
+            <a:lvl9pPr marL="1440815" indent="0" algn="ctr">
+              <a:buNone/>
+              <a:defRPr sz="630"/>
             </a:lvl9pPr>
           </a:lstStyle>
           <a:p>
@@ -491,8 +491,8 @@
         </p:nvSpPr>
         <p:spPr>
           <a:xfrm>
-            <a:off x="5420474" y="287990"/>
-            <a:ext cx="1633243" cy="4584062"/>
+            <a:off x="2581883" y="182459"/>
+            <a:ext cx="777947" cy="2904285"/>
           </a:xfrm>
         </p:spPr>
         <p:txBody>
@@ -519,8 +519,8 @@
         </p:nvSpPr>
         <p:spPr>
           <a:xfrm>
-            <a:off x="520744" y="287990"/>
-            <a:ext cx="4805050" cy="4584062"/>
+            <a:off x="248042" y="182459"/>
+            <a:ext cx="2288743" cy="2904285"/>
           </a:xfrm>
         </p:spPr>
         <p:txBody>
@@ -835,15 +835,15 @@
         </p:nvSpPr>
         <p:spPr>
           <a:xfrm>
-            <a:off x="516798" y="1348549"/>
-            <a:ext cx="6532973" cy="2250084"/>
+            <a:off x="246161" y="854389"/>
+            <a:ext cx="3111789" cy="1425566"/>
           </a:xfrm>
         </p:spPr>
         <p:txBody>
           <a:bodyPr anchor="b"/>
           <a:lstStyle>
             <a:lvl1pPr>
-              <a:defRPr sz="4735"/>
+              <a:defRPr sz="2365"/>
             </a:lvl1pPr>
           </a:lstStyle>
           <a:p>
@@ -867,8 +867,8 @@
         </p:nvSpPr>
         <p:spPr>
           <a:xfrm>
-            <a:off x="516798" y="3619918"/>
-            <a:ext cx="6532973" cy="1183265"/>
+            <a:off x="246161" y="2293442"/>
+            <a:ext cx="3111789" cy="749670"/>
           </a:xfrm>
         </p:spPr>
         <p:txBody>
@@ -876,7 +876,7 @@
           <a:lstStyle>
             <a:lvl1pPr marL="0" indent="0">
               <a:buNone/>
-              <a:defRPr sz="1895">
+              <a:defRPr sz="945">
                 <a:solidFill>
                   <a:schemeClr val="tx1">
                     <a:tint val="75000"/>
@@ -884,9 +884,9 @@
                 </a:solidFill>
               </a:defRPr>
             </a:lvl1pPr>
-            <a:lvl2pPr marL="360680" indent="0">
-              <a:buNone/>
-              <a:defRPr sz="1585">
+            <a:lvl2pPr marL="180340" indent="0">
+              <a:buNone/>
+              <a:defRPr sz="790">
                 <a:solidFill>
                   <a:schemeClr val="tx1">
                     <a:tint val="75000"/>
@@ -894,9 +894,9 @@
                 </a:solidFill>
               </a:defRPr>
             </a:lvl2pPr>
-            <a:lvl3pPr marL="720090" indent="0">
-              <a:buNone/>
-              <a:defRPr sz="1425">
+            <a:lvl3pPr marL="360045" indent="0">
+              <a:buNone/>
+              <a:defRPr sz="715">
                 <a:solidFill>
                   <a:schemeClr val="tx1">
                     <a:tint val="75000"/>
@@ -904,9 +904,9 @@
                 </a:solidFill>
               </a:defRPr>
             </a:lvl3pPr>
-            <a:lvl4pPr marL="1081405" indent="0">
-              <a:buNone/>
-              <a:defRPr sz="1255">
+            <a:lvl4pPr marL="540385" indent="0">
+              <a:buNone/>
+              <a:defRPr sz="630">
                 <a:solidFill>
                   <a:schemeClr val="tx1">
                     <a:tint val="75000"/>
@@ -914,9 +914,9 @@
                 </a:solidFill>
               </a:defRPr>
             </a:lvl4pPr>
-            <a:lvl5pPr marL="1442720" indent="0">
-              <a:buNone/>
-              <a:defRPr sz="1255">
+            <a:lvl5pPr marL="720725" indent="0">
+              <a:buNone/>
+              <a:defRPr sz="630">
                 <a:solidFill>
                   <a:schemeClr val="tx1">
                     <a:tint val="75000"/>
@@ -924,9 +924,9 @@
                 </a:solidFill>
               </a:defRPr>
             </a:lvl5pPr>
-            <a:lvl6pPr marL="1802765" indent="0">
-              <a:buNone/>
-              <a:defRPr sz="1255">
+            <a:lvl6pPr marL="901700" indent="0">
+              <a:buNone/>
+              <a:defRPr sz="630">
                 <a:solidFill>
                   <a:schemeClr val="tx1">
                     <a:tint val="75000"/>
@@ -934,9 +934,9 @@
                 </a:solidFill>
               </a:defRPr>
             </a:lvl6pPr>
-            <a:lvl7pPr marL="2160905" indent="0">
-              <a:buNone/>
-              <a:defRPr sz="1255">
+            <a:lvl7pPr marL="1080770" indent="0">
+              <a:buNone/>
+              <a:defRPr sz="630">
                 <a:solidFill>
                   <a:schemeClr val="tx1">
                     <a:tint val="75000"/>
@@ -944,9 +944,9 @@
                 </a:solidFill>
               </a:defRPr>
             </a:lvl7pPr>
-            <a:lvl8pPr marL="2523490" indent="0">
-              <a:buNone/>
-              <a:defRPr sz="1255">
+            <a:lvl8pPr marL="1261745" indent="0">
+              <a:buNone/>
+              <a:defRPr sz="630">
                 <a:solidFill>
                   <a:schemeClr val="tx1">
                     <a:tint val="75000"/>
@@ -954,9 +954,9 @@
                 </a:solidFill>
               </a:defRPr>
             </a:lvl8pPr>
-            <a:lvl9pPr marL="2881630" indent="0">
-              <a:buNone/>
-              <a:defRPr sz="1255">
+            <a:lvl9pPr marL="1440815" indent="0">
+              <a:buNone/>
+              <a:defRPr sz="630">
                 <a:solidFill>
                   <a:schemeClr val="tx1">
                     <a:tint val="75000"/>
@@ -1098,8 +1098,8 @@
         </p:nvSpPr>
         <p:spPr>
           <a:xfrm>
-            <a:off x="520744" y="1439954"/>
-            <a:ext cx="3219147" cy="3432100"/>
+            <a:off x="248042" y="912300"/>
+            <a:ext cx="1533347" cy="2174446"/>
           </a:xfrm>
         </p:spPr>
         <p:txBody>
@@ -1159,8 +1159,8 @@
         </p:nvSpPr>
         <p:spPr>
           <a:xfrm>
-            <a:off x="3834572" y="1439954"/>
-            <a:ext cx="3219147" cy="3432100"/>
+            <a:off x="1826485" y="912300"/>
+            <a:ext cx="1533347" cy="2174446"/>
           </a:xfrm>
         </p:spPr>
         <p:txBody>
@@ -1308,8 +1308,8 @@
         </p:nvSpPr>
         <p:spPr>
           <a:xfrm>
-            <a:off x="521730" y="287990"/>
-            <a:ext cx="6532973" cy="1045532"/>
+            <a:off x="248512" y="182459"/>
+            <a:ext cx="3111789" cy="662410"/>
           </a:xfrm>
         </p:spPr>
         <p:txBody>
@@ -1336,8 +1336,8 @@
         </p:nvSpPr>
         <p:spPr>
           <a:xfrm>
-            <a:off x="521730" y="1326011"/>
-            <a:ext cx="3204352" cy="649856"/>
+            <a:off x="248512" y="840109"/>
+            <a:ext cx="1526298" cy="411724"/>
           </a:xfrm>
         </p:spPr>
         <p:txBody>
@@ -1345,39 +1345,39 @@
           <a:lstStyle>
             <a:lvl1pPr marL="0" indent="0">
               <a:buNone/>
-              <a:defRPr sz="1895" b="1"/>
+              <a:defRPr sz="945" b="1"/>
             </a:lvl1pPr>
-            <a:lvl2pPr marL="360680" indent="0">
-              <a:buNone/>
-              <a:defRPr sz="1585" b="1"/>
+            <a:lvl2pPr marL="180340" indent="0">
+              <a:buNone/>
+              <a:defRPr sz="790" b="1"/>
             </a:lvl2pPr>
-            <a:lvl3pPr marL="720090" indent="0">
-              <a:buNone/>
-              <a:defRPr sz="1425" b="1"/>
+            <a:lvl3pPr marL="360045" indent="0">
+              <a:buNone/>
+              <a:defRPr sz="715" b="1"/>
             </a:lvl3pPr>
-            <a:lvl4pPr marL="1081405" indent="0">
-              <a:buNone/>
-              <a:defRPr sz="1255" b="1"/>
+            <a:lvl4pPr marL="540385" indent="0">
+              <a:buNone/>
+              <a:defRPr sz="630" b="1"/>
             </a:lvl4pPr>
-            <a:lvl5pPr marL="1442720" indent="0">
-              <a:buNone/>
-              <a:defRPr sz="1255" b="1"/>
+            <a:lvl5pPr marL="720725" indent="0">
+              <a:buNone/>
+              <a:defRPr sz="630" b="1"/>
             </a:lvl5pPr>
-            <a:lvl6pPr marL="1802765" indent="0">
-              <a:buNone/>
-              <a:defRPr sz="1255" b="1"/>
+            <a:lvl6pPr marL="901700" indent="0">
+              <a:buNone/>
+              <a:defRPr sz="630" b="1"/>
             </a:lvl6pPr>
-            <a:lvl7pPr marL="2160905" indent="0">
-              <a:buNone/>
-              <a:defRPr sz="1255" b="1"/>
+            <a:lvl7pPr marL="1080770" indent="0">
+              <a:buNone/>
+              <a:defRPr sz="630" b="1"/>
             </a:lvl7pPr>
-            <a:lvl8pPr marL="2523490" indent="0">
-              <a:buNone/>
-              <a:defRPr sz="1255" b="1"/>
+            <a:lvl8pPr marL="1261745" indent="0">
+              <a:buNone/>
+              <a:defRPr sz="630" b="1"/>
             </a:lvl8pPr>
-            <a:lvl9pPr marL="2881630" indent="0">
-              <a:buNone/>
-              <a:defRPr sz="1255" b="1"/>
+            <a:lvl9pPr marL="1440815" indent="0">
+              <a:buNone/>
+              <a:defRPr sz="630" b="1"/>
             </a:lvl9pPr>
           </a:lstStyle>
           <a:p>
@@ -1402,8 +1402,8 @@
         </p:nvSpPr>
         <p:spPr>
           <a:xfrm>
-            <a:off x="521730" y="1975867"/>
-            <a:ext cx="3204352" cy="2906203"/>
+            <a:off x="248512" y="1251832"/>
+            <a:ext cx="1526298" cy="1841258"/>
           </a:xfrm>
         </p:spPr>
         <p:txBody>
@@ -1463,8 +1463,8 @@
         </p:nvSpPr>
         <p:spPr>
           <a:xfrm>
-            <a:off x="3834572" y="1326011"/>
-            <a:ext cx="3220131" cy="649856"/>
+            <a:off x="1826485" y="840109"/>
+            <a:ext cx="1533815" cy="411724"/>
           </a:xfrm>
         </p:spPr>
         <p:txBody>
@@ -1472,39 +1472,39 @@
           <a:lstStyle>
             <a:lvl1pPr marL="0" indent="0">
               <a:buNone/>
-              <a:defRPr sz="1895" b="1"/>
+              <a:defRPr sz="945" b="1"/>
             </a:lvl1pPr>
-            <a:lvl2pPr marL="360680" indent="0">
-              <a:buNone/>
-              <a:defRPr sz="1585" b="1"/>
+            <a:lvl2pPr marL="180340" indent="0">
+              <a:buNone/>
+              <a:defRPr sz="790" b="1"/>
             </a:lvl2pPr>
-            <a:lvl3pPr marL="720090" indent="0">
-              <a:buNone/>
-              <a:defRPr sz="1425" b="1"/>
+            <a:lvl3pPr marL="360045" indent="0">
+              <a:buNone/>
+              <a:defRPr sz="715" b="1"/>
             </a:lvl3pPr>
-            <a:lvl4pPr marL="1081405" indent="0">
-              <a:buNone/>
-              <a:defRPr sz="1255" b="1"/>
+            <a:lvl4pPr marL="540385" indent="0">
+              <a:buNone/>
+              <a:defRPr sz="630" b="1"/>
             </a:lvl4pPr>
-            <a:lvl5pPr marL="1442720" indent="0">
-              <a:buNone/>
-              <a:defRPr sz="1255" b="1"/>
+            <a:lvl5pPr marL="720725" indent="0">
+              <a:buNone/>
+              <a:defRPr sz="630" b="1"/>
             </a:lvl5pPr>
-            <a:lvl6pPr marL="1802765" indent="0">
-              <a:buNone/>
-              <a:defRPr sz="1255" b="1"/>
+            <a:lvl6pPr marL="901700" indent="0">
+              <a:buNone/>
+              <a:defRPr sz="630" b="1"/>
             </a:lvl6pPr>
-            <a:lvl7pPr marL="2160905" indent="0">
-              <a:buNone/>
-              <a:defRPr sz="1255" b="1"/>
+            <a:lvl7pPr marL="1080770" indent="0">
+              <a:buNone/>
+              <a:defRPr sz="630" b="1"/>
             </a:lvl7pPr>
-            <a:lvl8pPr marL="2523490" indent="0">
-              <a:buNone/>
-              <a:defRPr sz="1255" b="1"/>
+            <a:lvl8pPr marL="1261745" indent="0">
+              <a:buNone/>
+              <a:defRPr sz="630" b="1"/>
             </a:lvl8pPr>
-            <a:lvl9pPr marL="2881630" indent="0">
-              <a:buNone/>
-              <a:defRPr sz="1255" b="1"/>
+            <a:lvl9pPr marL="1440815" indent="0">
+              <a:buNone/>
+              <a:defRPr sz="630" b="1"/>
             </a:lvl9pPr>
           </a:lstStyle>
           <a:p>
@@ -1529,8 +1529,8 @@
         </p:nvSpPr>
         <p:spPr>
           <a:xfrm>
-            <a:off x="3834572" y="1975867"/>
-            <a:ext cx="3220131" cy="2906203"/>
+            <a:off x="1826485" y="1251832"/>
+            <a:ext cx="1533815" cy="1841258"/>
           </a:xfrm>
         </p:spPr>
         <p:txBody>
@@ -1877,15 +1877,15 @@
         </p:nvSpPr>
         <p:spPr>
           <a:xfrm>
-            <a:off x="521730" y="360615"/>
-            <a:ext cx="2442959" cy="1262150"/>
+            <a:off x="248512" y="228471"/>
+            <a:ext cx="1163632" cy="799650"/>
           </a:xfrm>
         </p:spPr>
         <p:txBody>
           <a:bodyPr anchor="b"/>
           <a:lstStyle>
             <a:lvl1pPr>
-              <a:defRPr sz="2520"/>
+              <a:defRPr sz="1260"/>
             </a:lvl1pPr>
           </a:lstStyle>
           <a:p>
@@ -1909,39 +1909,39 @@
         </p:nvSpPr>
         <p:spPr>
           <a:xfrm>
-            <a:off x="3220131" y="778827"/>
-            <a:ext cx="3834572" cy="3844051"/>
+            <a:off x="1533815" y="493434"/>
+            <a:ext cx="1826485" cy="2435443"/>
           </a:xfrm>
         </p:spPr>
         <p:txBody>
           <a:bodyPr/>
           <a:lstStyle>
             <a:lvl1pPr>
-              <a:defRPr sz="2520"/>
+              <a:defRPr sz="1260"/>
             </a:lvl1pPr>
             <a:lvl2pPr>
-              <a:defRPr sz="2220"/>
+              <a:defRPr sz="1110"/>
             </a:lvl2pPr>
             <a:lvl3pPr>
-              <a:defRPr sz="1895"/>
+              <a:defRPr sz="945"/>
             </a:lvl3pPr>
             <a:lvl4pPr>
-              <a:defRPr sz="1585"/>
+              <a:defRPr sz="790"/>
             </a:lvl4pPr>
             <a:lvl5pPr>
-              <a:defRPr sz="1585"/>
+              <a:defRPr sz="790"/>
             </a:lvl5pPr>
             <a:lvl6pPr>
-              <a:defRPr sz="1585"/>
+              <a:defRPr sz="790"/>
             </a:lvl6pPr>
             <a:lvl7pPr>
-              <a:defRPr sz="1585"/>
+              <a:defRPr sz="790"/>
             </a:lvl7pPr>
             <a:lvl8pPr>
-              <a:defRPr sz="1585"/>
+              <a:defRPr sz="790"/>
             </a:lvl8pPr>
             <a:lvl9pPr>
-              <a:defRPr sz="1585"/>
+              <a:defRPr sz="790"/>
             </a:lvl9pPr>
           </a:lstStyle>
           <a:p>
@@ -1998,8 +1998,8 @@
         </p:nvSpPr>
         <p:spPr>
           <a:xfrm>
-            <a:off x="521730" y="1622766"/>
-            <a:ext cx="2442959" cy="3006375"/>
+            <a:off x="248512" y="1028122"/>
+            <a:ext cx="1163632" cy="1904725"/>
           </a:xfrm>
         </p:spPr>
         <p:txBody>
@@ -2007,39 +2007,39 @@
           <a:lstStyle>
             <a:lvl1pPr marL="0" indent="0">
               <a:buNone/>
-              <a:defRPr sz="1255"/>
+              <a:defRPr sz="630"/>
             </a:lvl1pPr>
-            <a:lvl2pPr marL="360680" indent="0">
-              <a:buNone/>
-              <a:defRPr sz="1105"/>
+            <a:lvl2pPr marL="180340" indent="0">
+              <a:buNone/>
+              <a:defRPr sz="555"/>
             </a:lvl2pPr>
-            <a:lvl3pPr marL="720090" indent="0">
-              <a:buNone/>
-              <a:defRPr sz="945"/>
+            <a:lvl3pPr marL="360045" indent="0">
+              <a:buNone/>
+              <a:defRPr sz="475"/>
             </a:lvl3pPr>
-            <a:lvl4pPr marL="1081405" indent="0">
-              <a:buNone/>
-              <a:defRPr sz="795"/>
+            <a:lvl4pPr marL="540385" indent="0">
+              <a:buNone/>
+              <a:defRPr sz="400"/>
             </a:lvl4pPr>
-            <a:lvl5pPr marL="1442720" indent="0">
-              <a:buNone/>
-              <a:defRPr sz="795"/>
+            <a:lvl5pPr marL="720725" indent="0">
+              <a:buNone/>
+              <a:defRPr sz="400"/>
             </a:lvl5pPr>
-            <a:lvl6pPr marL="1802765" indent="0">
-              <a:buNone/>
-              <a:defRPr sz="795"/>
+            <a:lvl6pPr marL="901700" indent="0">
+              <a:buNone/>
+              <a:defRPr sz="400"/>
             </a:lvl6pPr>
-            <a:lvl7pPr marL="2160905" indent="0">
-              <a:buNone/>
-              <a:defRPr sz="795"/>
+            <a:lvl7pPr marL="1080770" indent="0">
+              <a:buNone/>
+              <a:defRPr sz="400"/>
             </a:lvl7pPr>
-            <a:lvl8pPr marL="2523490" indent="0">
-              <a:buNone/>
-              <a:defRPr sz="795"/>
+            <a:lvl8pPr marL="1261745" indent="0">
+              <a:buNone/>
+              <a:defRPr sz="400"/>
             </a:lvl8pPr>
-            <a:lvl9pPr marL="2881630" indent="0">
-              <a:buNone/>
-              <a:defRPr sz="795"/>
+            <a:lvl9pPr marL="1440815" indent="0">
+              <a:buNone/>
+              <a:defRPr sz="400"/>
             </a:lvl9pPr>
           </a:lstStyle>
           <a:p>
@@ -2152,15 +2152,15 @@
         </p:nvSpPr>
         <p:spPr>
           <a:xfrm>
-            <a:off x="521730" y="360615"/>
-            <a:ext cx="2442959" cy="1262150"/>
+            <a:off x="248512" y="228471"/>
+            <a:ext cx="1163632" cy="799650"/>
           </a:xfrm>
         </p:spPr>
         <p:txBody>
           <a:bodyPr anchor="b"/>
           <a:lstStyle>
             <a:lvl1pPr>
-              <a:defRPr sz="2520"/>
+              <a:defRPr sz="1260"/>
             </a:lvl1pPr>
           </a:lstStyle>
           <a:p>
@@ -2184,8 +2184,8 @@
         </p:nvSpPr>
         <p:spPr>
           <a:xfrm>
-            <a:off x="3220131" y="778827"/>
-            <a:ext cx="3834572" cy="3844051"/>
+            <a:off x="1533815" y="493434"/>
+            <a:ext cx="1826485" cy="2435443"/>
           </a:xfrm>
         </p:spPr>
         <p:txBody>
@@ -2193,39 +2193,39 @@
           <a:lstStyle>
             <a:lvl1pPr marL="0" indent="0">
               <a:buNone/>
-              <a:defRPr sz="2520"/>
+              <a:defRPr sz="1260"/>
             </a:lvl1pPr>
-            <a:lvl2pPr marL="360680" indent="0">
-              <a:buNone/>
-              <a:defRPr sz="2220"/>
+            <a:lvl2pPr marL="180340" indent="0">
+              <a:buNone/>
+              <a:defRPr sz="1110"/>
             </a:lvl2pPr>
-            <a:lvl3pPr marL="720090" indent="0">
-              <a:buNone/>
-              <a:defRPr sz="1895"/>
+            <a:lvl3pPr marL="360045" indent="0">
+              <a:buNone/>
+              <a:defRPr sz="945"/>
             </a:lvl3pPr>
-            <a:lvl4pPr marL="1081405" indent="0">
-              <a:buNone/>
-              <a:defRPr sz="1585"/>
+            <a:lvl4pPr marL="540385" indent="0">
+              <a:buNone/>
+              <a:defRPr sz="790"/>
             </a:lvl4pPr>
-            <a:lvl5pPr marL="1442720" indent="0">
-              <a:buNone/>
-              <a:defRPr sz="1585"/>
+            <a:lvl5pPr marL="720725" indent="0">
+              <a:buNone/>
+              <a:defRPr sz="790"/>
             </a:lvl5pPr>
-            <a:lvl6pPr marL="1802765" indent="0">
-              <a:buNone/>
-              <a:defRPr sz="1585"/>
+            <a:lvl6pPr marL="901700" indent="0">
+              <a:buNone/>
+              <a:defRPr sz="790"/>
             </a:lvl6pPr>
-            <a:lvl7pPr marL="2160905" indent="0">
-              <a:buNone/>
-              <a:defRPr sz="1585"/>
+            <a:lvl7pPr marL="1080770" indent="0">
+              <a:buNone/>
+              <a:defRPr sz="790"/>
             </a:lvl7pPr>
-            <a:lvl8pPr marL="2523490" indent="0">
-              <a:buNone/>
-              <a:defRPr sz="1585"/>
+            <a:lvl8pPr marL="1261745" indent="0">
+              <a:buNone/>
+              <a:defRPr sz="790"/>
             </a:lvl8pPr>
-            <a:lvl9pPr marL="2881630" indent="0">
-              <a:buNone/>
-              <a:defRPr sz="1585"/>
+            <a:lvl9pPr marL="1440815" indent="0">
+              <a:buNone/>
+              <a:defRPr sz="790"/>
             </a:lvl9pPr>
           </a:lstStyle>
           <a:p>
@@ -2245,8 +2245,8 @@
         </p:nvSpPr>
         <p:spPr>
           <a:xfrm>
-            <a:off x="521730" y="1622766"/>
-            <a:ext cx="2442959" cy="3006375"/>
+            <a:off x="248512" y="1028122"/>
+            <a:ext cx="1163632" cy="1904725"/>
           </a:xfrm>
         </p:spPr>
         <p:txBody>
@@ -2254,39 +2254,39 @@
           <a:lstStyle>
             <a:lvl1pPr marL="0" indent="0">
               <a:buNone/>
-              <a:defRPr sz="1255"/>
+              <a:defRPr sz="630"/>
             </a:lvl1pPr>
-            <a:lvl2pPr marL="360680" indent="0">
-              <a:buNone/>
-              <a:defRPr sz="1105"/>
+            <a:lvl2pPr marL="180340" indent="0">
+              <a:buNone/>
+              <a:defRPr sz="555"/>
             </a:lvl2pPr>
-            <a:lvl3pPr marL="720090" indent="0">
-              <a:buNone/>
-              <a:defRPr sz="945"/>
+            <a:lvl3pPr marL="360045" indent="0">
+              <a:buNone/>
+              <a:defRPr sz="475"/>
             </a:lvl3pPr>
-            <a:lvl4pPr marL="1081405" indent="0">
-              <a:buNone/>
-              <a:defRPr sz="795"/>
+            <a:lvl4pPr marL="540385" indent="0">
+              <a:buNone/>
+              <a:defRPr sz="400"/>
             </a:lvl4pPr>
-            <a:lvl5pPr marL="1442720" indent="0">
-              <a:buNone/>
-              <a:defRPr sz="795"/>
+            <a:lvl5pPr marL="720725" indent="0">
+              <a:buNone/>
+              <a:defRPr sz="400"/>
             </a:lvl5pPr>
-            <a:lvl6pPr marL="1802765" indent="0">
-              <a:buNone/>
-              <a:defRPr sz="795"/>
+            <a:lvl6pPr marL="901700" indent="0">
+              <a:buNone/>
+              <a:defRPr sz="400"/>
             </a:lvl6pPr>
-            <a:lvl7pPr marL="2160905" indent="0">
-              <a:buNone/>
-              <a:defRPr sz="795"/>
+            <a:lvl7pPr marL="1080770" indent="0">
+              <a:buNone/>
+              <a:defRPr sz="400"/>
             </a:lvl7pPr>
-            <a:lvl8pPr marL="2523490" indent="0">
-              <a:buNone/>
-              <a:defRPr sz="795"/>
+            <a:lvl8pPr marL="1261745" indent="0">
+              <a:buNone/>
+              <a:defRPr sz="400"/>
             </a:lvl8pPr>
-            <a:lvl9pPr marL="2881630" indent="0">
-              <a:buNone/>
-              <a:defRPr sz="795"/>
+            <a:lvl9pPr marL="1440815" indent="0">
+              <a:buNone/>
+              <a:defRPr sz="400"/>
             </a:lvl9pPr>
           </a:lstStyle>
           <a:p>
@@ -2404,8 +2404,8 @@
         </p:nvSpPr>
         <p:spPr>
           <a:xfrm>
-            <a:off x="520744" y="287990"/>
-            <a:ext cx="6532973" cy="1045532"/>
+            <a:off x="248042" y="182459"/>
+            <a:ext cx="3111789" cy="662410"/>
           </a:xfrm>
           <a:prstGeom prst="rect">
             <a:avLst/>
@@ -2437,8 +2437,8 @@
         </p:nvSpPr>
         <p:spPr>
           <a:xfrm>
-            <a:off x="520744" y="1439954"/>
-            <a:ext cx="6532973" cy="3432100"/>
+            <a:off x="248042" y="912300"/>
+            <a:ext cx="3111789" cy="2174446"/>
           </a:xfrm>
           <a:prstGeom prst="rect">
             <a:avLst/>
@@ -2503,8 +2503,8 @@
         </p:nvSpPr>
         <p:spPr>
           <a:xfrm>
-            <a:off x="520744" y="5013543"/>
-            <a:ext cx="1704251" cy="287990"/>
+            <a:off x="248042" y="3176388"/>
+            <a:ext cx="811769" cy="182459"/>
           </a:xfrm>
           <a:prstGeom prst="rect">
             <a:avLst/>
@@ -2514,7 +2514,7 @@
           <a:bodyPr vert="horz" lIns="91440" tIns="45720" rIns="91440" bIns="45720" rtlCol="0" anchor="ctr"/>
           <a:lstStyle>
             <a:lvl1pPr algn="l">
-              <a:defRPr sz="945">
+              <a:defRPr sz="475">
                 <a:solidFill>
                   <a:schemeClr val="tx1">
                     <a:tint val="75000"/>
@@ -2543,8 +2543,8 @@
         </p:nvSpPr>
         <p:spPr>
           <a:xfrm>
-            <a:off x="2509039" y="5013543"/>
-            <a:ext cx="2556380" cy="287990"/>
+            <a:off x="1195106" y="3176388"/>
+            <a:ext cx="1217656" cy="182459"/>
           </a:xfrm>
           <a:prstGeom prst="rect">
             <a:avLst/>
@@ -2554,7 +2554,7 @@
           <a:bodyPr vert="horz" lIns="91440" tIns="45720" rIns="91440" bIns="45720" rtlCol="0" anchor="ctr"/>
           <a:lstStyle>
             <a:lvl1pPr algn="ctr">
-              <a:defRPr sz="945">
+              <a:defRPr sz="475">
                 <a:solidFill>
                   <a:schemeClr val="tx1">
                     <a:tint val="75000"/>
@@ -2580,8 +2580,8 @@
         </p:nvSpPr>
         <p:spPr>
           <a:xfrm>
-            <a:off x="5349465" y="5013543"/>
-            <a:ext cx="1704251" cy="287990"/>
+            <a:off x="2548060" y="3176388"/>
+            <a:ext cx="811769" cy="182459"/>
           </a:xfrm>
           <a:prstGeom prst="rect">
             <a:avLst/>
@@ -2591,7 +2591,7 @@
           <a:bodyPr vert="horz" lIns="91440" tIns="45720" rIns="91440" bIns="45720" rtlCol="0" anchor="ctr"/>
           <a:lstStyle>
             <a:lvl1pPr algn="r">
-              <a:defRPr sz="945">
+              <a:defRPr sz="475">
                 <a:solidFill>
                   <a:schemeClr val="tx1">
                     <a:tint val="75000"/>
@@ -2626,7 +2626,7 @@
   </p:sldLayoutIdLst>
   <p:txStyles>
     <p:titleStyle>
-      <a:lvl1pPr algn="l" defTabSz="720090" rtl="0" eaLnBrk="1" latinLnBrk="0" hangingPunct="1">
+      <a:lvl1pPr algn="l" defTabSz="360045" rtl="0" eaLnBrk="1" latinLnBrk="0" hangingPunct="1">
         <a:lnSpc>
           <a:spcPct val="90000"/>
         </a:lnSpc>
@@ -2634,7 +2634,7 @@
           <a:spcPct val="0"/>
         </a:spcBef>
         <a:buNone/>
-        <a:defRPr sz="3470" kern="1200">
+        <a:defRPr sz="1735" kern="1200">
           <a:solidFill>
             <a:schemeClr val="tx1"/>
           </a:solidFill>
@@ -2645,16 +2645,16 @@
       </a:lvl1pPr>
     </p:titleStyle>
     <p:bodyStyle>
-      <a:lvl1pPr marL="180975" indent="-180975" algn="l" defTabSz="720090" rtl="0" eaLnBrk="1" latinLnBrk="0" hangingPunct="1">
+      <a:lvl1pPr marL="90805" indent="-90805" algn="l" defTabSz="360045" rtl="0" eaLnBrk="1" latinLnBrk="0" hangingPunct="1">
         <a:lnSpc>
           <a:spcPct val="90000"/>
         </a:lnSpc>
         <a:spcBef>
-          <a:spcPct val="156000"/>
+          <a:spcPct val="78000"/>
         </a:spcBef>
         <a:buFont typeface="Arial" panose="020B0604020202020204" pitchFamily="34" charset="0"/>
         <a:buChar char="•"/>
-        <a:defRPr sz="2220" kern="1200">
+        <a:defRPr sz="1110" kern="1200">
           <a:solidFill>
             <a:schemeClr val="tx1"/>
           </a:solidFill>
@@ -2663,16 +2663,16 @@
           <a:cs typeface="+mn-cs"/>
         </a:defRPr>
       </a:lvl1pPr>
-      <a:lvl2pPr marL="540385" indent="-180975" algn="l" defTabSz="720090" rtl="0" eaLnBrk="1" latinLnBrk="0" hangingPunct="1">
+      <a:lvl2pPr marL="270510" indent="-90805" algn="l" defTabSz="360045" rtl="0" eaLnBrk="1" latinLnBrk="0" hangingPunct="1">
         <a:lnSpc>
           <a:spcPct val="90000"/>
         </a:lnSpc>
         <a:spcBef>
-          <a:spcPts val="385"/>
+          <a:spcPct val="39000"/>
         </a:spcBef>
         <a:buFont typeface="Arial" panose="020B0604020202020204" pitchFamily="34" charset="0"/>
         <a:buChar char="•"/>
-        <a:defRPr sz="1895" kern="1200">
+        <a:defRPr sz="945" kern="1200">
           <a:solidFill>
             <a:schemeClr val="tx1"/>
           </a:solidFill>
@@ -2681,16 +2681,16 @@
           <a:cs typeface="+mn-cs"/>
         </a:defRPr>
       </a:lvl2pPr>
-      <a:lvl3pPr marL="901700" indent="-180975" algn="l" defTabSz="720090" rtl="0" eaLnBrk="1" latinLnBrk="0" hangingPunct="1">
+      <a:lvl3pPr marL="451485" indent="-90805" algn="l" defTabSz="360045" rtl="0" eaLnBrk="1" latinLnBrk="0" hangingPunct="1">
         <a:lnSpc>
           <a:spcPct val="90000"/>
         </a:lnSpc>
         <a:spcBef>
-          <a:spcPts val="385"/>
+          <a:spcPct val="39000"/>
         </a:spcBef>
         <a:buFont typeface="Arial" panose="020B0604020202020204" pitchFamily="34" charset="0"/>
         <a:buChar char="•"/>
-        <a:defRPr sz="1585" kern="1200">
+        <a:defRPr sz="790" kern="1200">
           <a:solidFill>
             <a:schemeClr val="tx1"/>
           </a:solidFill>
@@ -2699,16 +2699,16 @@
           <a:cs typeface="+mn-cs"/>
         </a:defRPr>
       </a:lvl3pPr>
-      <a:lvl4pPr marL="1263015" indent="-180975" algn="l" defTabSz="720090" rtl="0" eaLnBrk="1" latinLnBrk="0" hangingPunct="1">
+      <a:lvl4pPr marL="631190" indent="-90805" algn="l" defTabSz="360045" rtl="0" eaLnBrk="1" latinLnBrk="0" hangingPunct="1">
         <a:lnSpc>
           <a:spcPct val="90000"/>
         </a:lnSpc>
         <a:spcBef>
-          <a:spcPts val="385"/>
+          <a:spcPct val="39000"/>
         </a:spcBef>
         <a:buFont typeface="Arial" panose="020B0604020202020204" pitchFamily="34" charset="0"/>
         <a:buChar char="•"/>
-        <a:defRPr sz="1425" kern="1200">
+        <a:defRPr sz="715" kern="1200">
           <a:solidFill>
             <a:schemeClr val="tx1"/>
           </a:solidFill>
@@ -2717,16 +2717,16 @@
           <a:cs typeface="+mn-cs"/>
         </a:defRPr>
       </a:lvl4pPr>
-      <a:lvl5pPr marL="1623060" indent="-180975" algn="l" defTabSz="720090" rtl="0" eaLnBrk="1" latinLnBrk="0" hangingPunct="1">
+      <a:lvl5pPr marL="811530" indent="-90805" algn="l" defTabSz="360045" rtl="0" eaLnBrk="1" latinLnBrk="0" hangingPunct="1">
         <a:lnSpc>
           <a:spcPct val="90000"/>
         </a:lnSpc>
         <a:spcBef>
-          <a:spcPts val="385"/>
+          <a:spcPct val="39000"/>
         </a:spcBef>
         <a:buFont typeface="Arial" panose="020B0604020202020204" pitchFamily="34" charset="0"/>
         <a:buChar char="•"/>
-        <a:defRPr sz="1425" kern="1200">
+        <a:defRPr sz="715" kern="1200">
           <a:solidFill>
             <a:schemeClr val="tx1"/>
           </a:solidFill>
@@ -2735,16 +2735,16 @@
           <a:cs typeface="+mn-cs"/>
         </a:defRPr>
       </a:lvl5pPr>
-      <a:lvl6pPr marL="1979930" indent="-180975" algn="l" defTabSz="720090" rtl="0" eaLnBrk="1" latinLnBrk="0" hangingPunct="1">
+      <a:lvl6pPr marL="989965" indent="-90805" algn="l" defTabSz="360045" rtl="0" eaLnBrk="1" latinLnBrk="0" hangingPunct="1">
         <a:lnSpc>
           <a:spcPct val="90000"/>
         </a:lnSpc>
         <a:spcBef>
-          <a:spcPts val="385"/>
+          <a:spcPct val="39000"/>
         </a:spcBef>
         <a:buFont typeface="Arial" panose="020B0604020202020204" pitchFamily="34" charset="0"/>
         <a:buChar char="•"/>
-        <a:defRPr sz="1425" kern="1200">
+        <a:defRPr sz="715" kern="1200">
           <a:solidFill>
             <a:schemeClr val="tx1"/>
           </a:solidFill>
@@ -2753,16 +2753,16 @@
           <a:cs typeface="+mn-cs"/>
         </a:defRPr>
       </a:lvl6pPr>
-      <a:lvl7pPr marL="2342515" indent="-180975" algn="l" defTabSz="720090" rtl="0" eaLnBrk="1" latinLnBrk="0" hangingPunct="1">
+      <a:lvl7pPr marL="1170940" indent="-90805" algn="l" defTabSz="360045" rtl="0" eaLnBrk="1" latinLnBrk="0" hangingPunct="1">
         <a:lnSpc>
           <a:spcPct val="90000"/>
         </a:lnSpc>
         <a:spcBef>
-          <a:spcPts val="385"/>
+          <a:spcPct val="39000"/>
         </a:spcBef>
         <a:buFont typeface="Arial" panose="020B0604020202020204" pitchFamily="34" charset="0"/>
         <a:buChar char="•"/>
-        <a:defRPr sz="1425" kern="1200">
+        <a:defRPr sz="715" kern="1200">
           <a:solidFill>
             <a:schemeClr val="tx1"/>
           </a:solidFill>
@@ -2771,16 +2771,16 @@
           <a:cs typeface="+mn-cs"/>
         </a:defRPr>
       </a:lvl7pPr>
-      <a:lvl8pPr marL="2703195" indent="-180975" algn="l" defTabSz="720090" rtl="0" eaLnBrk="1" latinLnBrk="0" hangingPunct="1">
+      <a:lvl8pPr marL="1351915" indent="-90805" algn="l" defTabSz="360045" rtl="0" eaLnBrk="1" latinLnBrk="0" hangingPunct="1">
         <a:lnSpc>
           <a:spcPct val="90000"/>
         </a:lnSpc>
         <a:spcBef>
-          <a:spcPts val="385"/>
+          <a:spcPct val="39000"/>
         </a:spcBef>
         <a:buFont typeface="Arial" panose="020B0604020202020204" pitchFamily="34" charset="0"/>
         <a:buChar char="•"/>
-        <a:defRPr sz="1425" kern="1200">
+        <a:defRPr sz="715" kern="1200">
           <a:solidFill>
             <a:schemeClr val="tx1"/>
           </a:solidFill>
@@ -2789,16 +2789,16 @@
           <a:cs typeface="+mn-cs"/>
         </a:defRPr>
       </a:lvl8pPr>
-      <a:lvl9pPr marL="3065780" indent="-180975" algn="l" defTabSz="720090" rtl="0" eaLnBrk="1" latinLnBrk="0" hangingPunct="1">
+      <a:lvl9pPr marL="1532890" indent="-90805" algn="l" defTabSz="360045" rtl="0" eaLnBrk="1" latinLnBrk="0" hangingPunct="1">
         <a:lnSpc>
           <a:spcPct val="90000"/>
         </a:lnSpc>
         <a:spcBef>
-          <a:spcPts val="385"/>
+          <a:spcPct val="39000"/>
         </a:spcBef>
         <a:buFont typeface="Arial" panose="020B0604020202020204" pitchFamily="34" charset="0"/>
         <a:buChar char="•"/>
-        <a:defRPr sz="1425" kern="1200">
+        <a:defRPr sz="715" kern="1200">
           <a:solidFill>
             <a:schemeClr val="tx1"/>
           </a:solidFill>
@@ -2812,8 +2812,8 @@
       <a:defPPr>
         <a:defRPr lang="zh-CN"/>
       </a:defPPr>
-      <a:lvl1pPr marL="0" algn="l" defTabSz="720090" rtl="0" eaLnBrk="1" latinLnBrk="0" hangingPunct="1">
-        <a:defRPr sz="1425" kern="1200">
+      <a:lvl1pPr marL="0" algn="l" defTabSz="360045" rtl="0" eaLnBrk="1" latinLnBrk="0" hangingPunct="1">
+        <a:defRPr sz="715" kern="1200">
           <a:solidFill>
             <a:schemeClr val="tx1"/>
           </a:solidFill>
@@ -2822,8 +2822,8 @@
           <a:cs typeface="+mn-cs"/>
         </a:defRPr>
       </a:lvl1pPr>
-      <a:lvl2pPr marL="360680" algn="l" defTabSz="720090" rtl="0" eaLnBrk="1" latinLnBrk="0" hangingPunct="1">
-        <a:defRPr sz="1425" kern="1200">
+      <a:lvl2pPr marL="180340" algn="l" defTabSz="360045" rtl="0" eaLnBrk="1" latinLnBrk="0" hangingPunct="1">
+        <a:defRPr sz="715" kern="1200">
           <a:solidFill>
             <a:schemeClr val="tx1"/>
           </a:solidFill>
@@ -2832,8 +2832,8 @@
           <a:cs typeface="+mn-cs"/>
         </a:defRPr>
       </a:lvl2pPr>
-      <a:lvl3pPr marL="720090" algn="l" defTabSz="720090" rtl="0" eaLnBrk="1" latinLnBrk="0" hangingPunct="1">
-        <a:defRPr sz="1425" kern="1200">
+      <a:lvl3pPr marL="360045" algn="l" defTabSz="360045" rtl="0" eaLnBrk="1" latinLnBrk="0" hangingPunct="1">
+        <a:defRPr sz="715" kern="1200">
           <a:solidFill>
             <a:schemeClr val="tx1"/>
           </a:solidFill>
@@ -2842,8 +2842,8 @@
           <a:cs typeface="+mn-cs"/>
         </a:defRPr>
       </a:lvl3pPr>
-      <a:lvl4pPr marL="1081405" algn="l" defTabSz="720090" rtl="0" eaLnBrk="1" latinLnBrk="0" hangingPunct="1">
-        <a:defRPr sz="1425" kern="1200">
+      <a:lvl4pPr marL="540385" algn="l" defTabSz="360045" rtl="0" eaLnBrk="1" latinLnBrk="0" hangingPunct="1">
+        <a:defRPr sz="715" kern="1200">
           <a:solidFill>
             <a:schemeClr val="tx1"/>
           </a:solidFill>
@@ -2852,8 +2852,8 @@
           <a:cs typeface="+mn-cs"/>
         </a:defRPr>
       </a:lvl4pPr>
-      <a:lvl5pPr marL="1442720" algn="l" defTabSz="720090" rtl="0" eaLnBrk="1" latinLnBrk="0" hangingPunct="1">
-        <a:defRPr sz="1425" kern="1200">
+      <a:lvl5pPr marL="720725" algn="l" defTabSz="360045" rtl="0" eaLnBrk="1" latinLnBrk="0" hangingPunct="1">
+        <a:defRPr sz="715" kern="1200">
           <a:solidFill>
             <a:schemeClr val="tx1"/>
           </a:solidFill>
@@ -2862,8 +2862,8 @@
           <a:cs typeface="+mn-cs"/>
         </a:defRPr>
       </a:lvl5pPr>
-      <a:lvl6pPr marL="1802765" algn="l" defTabSz="720090" rtl="0" eaLnBrk="1" latinLnBrk="0" hangingPunct="1">
-        <a:defRPr sz="1425" kern="1200">
+      <a:lvl6pPr marL="901700" algn="l" defTabSz="360045" rtl="0" eaLnBrk="1" latinLnBrk="0" hangingPunct="1">
+        <a:defRPr sz="715" kern="1200">
           <a:solidFill>
             <a:schemeClr val="tx1"/>
           </a:solidFill>
@@ -2872,8 +2872,8 @@
           <a:cs typeface="+mn-cs"/>
         </a:defRPr>
       </a:lvl6pPr>
-      <a:lvl7pPr marL="2160905" algn="l" defTabSz="720090" rtl="0" eaLnBrk="1" latinLnBrk="0" hangingPunct="1">
-        <a:defRPr sz="1425" kern="1200">
+      <a:lvl7pPr marL="1080770" algn="l" defTabSz="360045" rtl="0" eaLnBrk="1" latinLnBrk="0" hangingPunct="1">
+        <a:defRPr sz="715" kern="1200">
           <a:solidFill>
             <a:schemeClr val="tx1"/>
           </a:solidFill>
@@ -2882,8 +2882,8 @@
           <a:cs typeface="+mn-cs"/>
         </a:defRPr>
       </a:lvl7pPr>
-      <a:lvl8pPr marL="2523490" algn="l" defTabSz="720090" rtl="0" eaLnBrk="1" latinLnBrk="0" hangingPunct="1">
-        <a:defRPr sz="1425" kern="1200">
+      <a:lvl8pPr marL="1261745" algn="l" defTabSz="360045" rtl="0" eaLnBrk="1" latinLnBrk="0" hangingPunct="1">
+        <a:defRPr sz="715" kern="1200">
           <a:solidFill>
             <a:schemeClr val="tx1"/>
           </a:solidFill>
@@ -2892,8 +2892,8 @@
           <a:cs typeface="+mn-cs"/>
         </a:defRPr>
       </a:lvl8pPr>
-      <a:lvl9pPr marL="2881630" algn="l" defTabSz="720090" rtl="0" eaLnBrk="1" latinLnBrk="0" hangingPunct="1">
-        <a:defRPr sz="1425" kern="1200">
+      <a:lvl9pPr marL="1440815" algn="l" defTabSz="360045" rtl="0" eaLnBrk="1" latinLnBrk="0" hangingPunct="1">
+        <a:defRPr sz="715" kern="1200">
           <a:solidFill>
             <a:schemeClr val="tx1"/>
           </a:solidFill>
@@ -2919,7 +2919,7 @@
       <p:grpSpPr/>
       <p:pic>
         <p:nvPicPr>
-          <p:cNvPr id="2" name="图片 1" descr="Figure 2(C)"/>
+          <p:cNvPr id="3" name="图片 2" descr="Figure 2(A)"/>
           <p:cNvPicPr>
             <a:picLocks noChangeAspect="1"/>
           </p:cNvPicPr>
@@ -2931,79 +2931,21 @@
         </p:nvPicPr>
         <p:blipFill>
           <a:blip r:embed="rId2"/>
-          <a:srcRect l="4847" t="2981" r="39395" b="35368"/>
+          <a:srcRect l="8415" t="5226" r="12365" b="13275"/>
           <a:stretch>
             <a:fillRect/>
           </a:stretch>
         </p:blipFill>
         <p:spPr>
           <a:xfrm>
-            <a:off x="135890" y="2860040"/>
-            <a:ext cx="3402000" cy="2427218"/>
+            <a:off x="81055" y="116986"/>
+            <a:ext cx="3429060" cy="2736141"/>
           </a:xfrm>
           <a:prstGeom prst="rect">
             <a:avLst/>
           </a:prstGeom>
         </p:spPr>
       </p:pic>
-      <p:pic>
-        <p:nvPicPr>
-          <p:cNvPr id="7" name="图片 6" descr="Figure 2(A)"/>
-          <p:cNvPicPr>
-            <a:picLocks noChangeAspect="1"/>
-          </p:cNvPicPr>
-          <p:nvPr>
-            <p:custDataLst>
-              <p:tags r:id="rId3"/>
-            </p:custDataLst>
-          </p:nvPr>
-        </p:nvPicPr>
-        <p:blipFill>
-          <a:blip r:embed="rId4"/>
-          <a:srcRect l="4834" t="4300" r="39384" b="35436"/>
-          <a:stretch>
-            <a:fillRect/>
-          </a:stretch>
-        </p:blipFill>
-        <p:spPr>
-          <a:xfrm>
-            <a:off x="127509" y="404016"/>
-            <a:ext cx="3401492" cy="2376349"/>
-          </a:xfrm>
-          <a:prstGeom prst="rect">
-            <a:avLst/>
-          </a:prstGeom>
-        </p:spPr>
-      </p:pic>
-      <p:pic>
-        <p:nvPicPr>
-          <p:cNvPr id="8" name="图片 7" descr="Figure 2(B)"/>
-          <p:cNvPicPr>
-            <a:picLocks noChangeAspect="1"/>
-          </p:cNvPicPr>
-          <p:nvPr>
-            <p:custDataLst>
-              <p:tags r:id="rId5"/>
-            </p:custDataLst>
-          </p:nvPr>
-        </p:nvPicPr>
-        <p:blipFill>
-          <a:blip r:embed="rId6"/>
-          <a:srcRect l="4824" t="4366" r="39452" b="35347"/>
-          <a:stretch>
-            <a:fillRect/>
-          </a:stretch>
-        </p:blipFill>
-        <p:spPr>
-          <a:xfrm>
-            <a:off x="3698114" y="407567"/>
-            <a:ext cx="3393294" cy="2376349"/>
-          </a:xfrm>
-          <a:prstGeom prst="rect">
-            <a:avLst/>
-          </a:prstGeom>
-        </p:spPr>
-      </p:pic>
       <p:sp>
         <p:nvSpPr>
           <p:cNvPr id="15" name="文本框 14"/>
@@ -3012,8 +2954,8 @@
         </p:nvSpPr>
         <p:spPr>
           <a:xfrm>
-            <a:off x="47777" y="55857"/>
-            <a:ext cx="6913129" cy="260350"/>
+            <a:off x="23496" y="2873845"/>
+            <a:ext cx="3552373" cy="521970"/>
           </a:xfrm>
           <a:prstGeom prst="rect">
             <a:avLst/>
@@ -3027,206 +2969,41 @@
           <a:p>
             <a:pPr algn="l"/>
             <a:r>
-              <a:rPr lang="en-US" altLang="zh-CN" sz="1100">
+              <a:rPr lang="en-US" altLang="zh-CN" sz="700" b="1">
                 <a:latin typeface="Times New Roman" panose="02020603050405020304" charset="0"/>
                 <a:cs typeface="Times New Roman" panose="02020603050405020304" charset="0"/>
                 <a:sym typeface="+mn-ea"/>
               </a:rPr>
-              <a:t>Taukim Xu, et.al. Figure 2. </a:t>
-            </a:r>
-            <a:endParaRPr lang="en-US" altLang="zh-CN" sz="1100">
+              <a:t>Fig. 2. The life-course variation pattern of coefficients a and b.</a:t>
+            </a:r>
+            <a:r>
+              <a:rPr lang="en-US" altLang="zh-CN" sz="700">
+                <a:latin typeface="Times New Roman" panose="02020603050405020304" charset="0"/>
+                <a:cs typeface="Times New Roman" panose="02020603050405020304" charset="0"/>
+                <a:sym typeface="+mn-ea"/>
+              </a:rPr>
+              <a:t> The solid line represents the mean values across ages, and the shaded area indicates the range between the 5th and 95th percentiles. The data from America was specially categorized according to the experiment. The hyperbolic weight-height constraint model is formulated as 1 = a/Weight + b</a:t>
+            </a:r>
+            <a:r>
+              <a:rPr lang="en-US" altLang="en-US" sz="700">
+                <a:latin typeface="Times New Roman" panose="02020603050405020304" charset="0"/>
+                <a:cs typeface="Times New Roman" panose="02020603050405020304" charset="0"/>
+                <a:sym typeface="+mn-ea"/>
+              </a:rPr>
+              <a:t>×</a:t>
+            </a:r>
+            <a:r>
+              <a:rPr lang="en-US" altLang="zh-CN" sz="700">
+                <a:latin typeface="Times New Roman" panose="02020603050405020304" charset="0"/>
+                <a:cs typeface="Times New Roman" panose="02020603050405020304" charset="0"/>
+                <a:sym typeface="+mn-ea"/>
+              </a:rPr>
+              <a:t>Height.</a:t>
+            </a:r>
+            <a:endParaRPr lang="en-US" altLang="zh-CN" sz="700">
               <a:latin typeface="Times New Roman" panose="02020603050405020304" charset="0"/>
               <a:cs typeface="Times New Roman" panose="02020603050405020304" charset="0"/>
               <a:sym typeface="+mn-ea"/>
-            </a:endParaRPr>
-          </a:p>
-        </p:txBody>
-      </p:sp>
-      <p:sp>
-        <p:nvSpPr>
-          <p:cNvPr id="26" name="文本框 25"/>
-          <p:cNvSpPr txBox="1"/>
-          <p:nvPr>
-            <p:custDataLst>
-              <p:tags r:id="rId7"/>
-            </p:custDataLst>
-          </p:nvPr>
-        </p:nvSpPr>
-        <p:spPr>
-          <a:xfrm>
-            <a:off x="81005" y="247640"/>
-            <a:ext cx="136933" cy="357158"/>
-          </a:xfrm>
-          <a:prstGeom prst="rect">
-            <a:avLst/>
-          </a:prstGeom>
-          <a:noFill/>
-        </p:spPr>
-        <p:txBody>
-          <a:bodyPr wrap="square" rtlCol="0">
-            <a:noAutofit/>
-          </a:bodyPr>
-          <a:p>
-            <a:pPr algn="ctr"/>
-            <a:r>
-              <a:rPr lang="en-US" altLang="zh-CN" sz="1400" b="1">
-                <a:latin typeface="Times New Roman" panose="02020603050405020304" charset="0"/>
-                <a:cs typeface="Times New Roman" panose="02020603050405020304" charset="0"/>
-              </a:rPr>
-              <a:t>a</a:t>
-            </a:r>
-            <a:endParaRPr lang="en-US" altLang="zh-CN" sz="1400" b="1">
-              <a:latin typeface="Times New Roman" panose="02020603050405020304" charset="0"/>
-              <a:cs typeface="Times New Roman" panose="02020603050405020304" charset="0"/>
-            </a:endParaRPr>
-          </a:p>
-        </p:txBody>
-      </p:sp>
-      <p:sp>
-        <p:nvSpPr>
-          <p:cNvPr id="3" name="文本框 2"/>
-          <p:cNvSpPr txBox="1"/>
-          <p:nvPr>
-            <p:custDataLst>
-              <p:tags r:id="rId8"/>
-            </p:custDataLst>
-          </p:nvPr>
-        </p:nvSpPr>
-        <p:spPr>
-          <a:xfrm>
-            <a:off x="3661770" y="265670"/>
-            <a:ext cx="136933" cy="357158"/>
-          </a:xfrm>
-          <a:prstGeom prst="rect">
-            <a:avLst/>
-          </a:prstGeom>
-          <a:noFill/>
-        </p:spPr>
-        <p:txBody>
-          <a:bodyPr wrap="square" rtlCol="0">
-            <a:noAutofit/>
-          </a:bodyPr>
-          <a:p>
-            <a:pPr algn="ctr"/>
-            <a:r>
-              <a:rPr lang="en-US" altLang="zh-CN" sz="1400" b="1">
-                <a:latin typeface="Times New Roman" panose="02020603050405020304" charset="0"/>
-                <a:cs typeface="Times New Roman" panose="02020603050405020304" charset="0"/>
-              </a:rPr>
-              <a:t>b</a:t>
-            </a:r>
-            <a:endParaRPr lang="en-US" altLang="zh-CN" sz="1400" b="1">
-              <a:latin typeface="Times New Roman" panose="02020603050405020304" charset="0"/>
-              <a:cs typeface="Times New Roman" panose="02020603050405020304" charset="0"/>
-            </a:endParaRPr>
-          </a:p>
-        </p:txBody>
-      </p:sp>
-      <p:sp>
-        <p:nvSpPr>
-          <p:cNvPr id="5" name="文本框 4"/>
-          <p:cNvSpPr txBox="1"/>
-          <p:nvPr>
-            <p:custDataLst>
-              <p:tags r:id="rId9"/>
-            </p:custDataLst>
-          </p:nvPr>
-        </p:nvSpPr>
-        <p:spPr>
-          <a:xfrm>
-            <a:off x="81005" y="2670415"/>
-            <a:ext cx="136933" cy="357158"/>
-          </a:xfrm>
-          <a:prstGeom prst="rect">
-            <a:avLst/>
-          </a:prstGeom>
-          <a:noFill/>
-        </p:spPr>
-        <p:txBody>
-          <a:bodyPr wrap="square" rtlCol="0">
-            <a:noAutofit/>
-          </a:bodyPr>
-          <a:p>
-            <a:pPr algn="ctr"/>
-            <a:r>
-              <a:rPr lang="en-US" altLang="zh-CN" sz="1400" b="1">
-                <a:latin typeface="Times New Roman" panose="02020603050405020304" charset="0"/>
-                <a:cs typeface="Times New Roman" panose="02020603050405020304" charset="0"/>
-              </a:rPr>
-              <a:t>c</a:t>
-            </a:r>
-            <a:endParaRPr lang="en-US" altLang="zh-CN" sz="1400" b="1">
-              <a:latin typeface="Times New Roman" panose="02020603050405020304" charset="0"/>
-              <a:cs typeface="Times New Roman" panose="02020603050405020304" charset="0"/>
-            </a:endParaRPr>
-          </a:p>
-        </p:txBody>
-      </p:sp>
-      <p:pic>
-        <p:nvPicPr>
-          <p:cNvPr id="6" name="图片 5" descr="Figure 2(D)"/>
-          <p:cNvPicPr>
-            <a:picLocks noChangeAspect="1"/>
-          </p:cNvPicPr>
-          <p:nvPr>
-            <p:custDataLst>
-              <p:tags r:id="rId10"/>
-            </p:custDataLst>
-          </p:nvPr>
-        </p:nvPicPr>
-        <p:blipFill>
-          <a:blip r:embed="rId11"/>
-          <a:srcRect l="4889" t="2938" r="39395" b="35383"/>
-          <a:stretch>
-            <a:fillRect/>
-          </a:stretch>
-        </p:blipFill>
-        <p:spPr>
-          <a:xfrm>
-            <a:off x="3701415" y="2847975"/>
-            <a:ext cx="3402000" cy="2433664"/>
-          </a:xfrm>
-          <a:prstGeom prst="rect">
-            <a:avLst/>
-          </a:prstGeom>
-        </p:spPr>
-      </p:pic>
-      <p:sp>
-        <p:nvSpPr>
-          <p:cNvPr id="9" name="文本框 8"/>
-          <p:cNvSpPr txBox="1"/>
-          <p:nvPr>
-            <p:custDataLst>
-              <p:tags r:id="rId12"/>
-            </p:custDataLst>
-          </p:nvPr>
-        </p:nvSpPr>
-        <p:spPr>
-          <a:xfrm>
-            <a:off x="3661770" y="2670415"/>
-            <a:ext cx="136933" cy="357158"/>
-          </a:xfrm>
-          <a:prstGeom prst="rect">
-            <a:avLst/>
-          </a:prstGeom>
-          <a:noFill/>
-        </p:spPr>
-        <p:txBody>
-          <a:bodyPr wrap="square" rtlCol="0">
-            <a:noAutofit/>
-          </a:bodyPr>
-          <a:p>
-            <a:pPr algn="ctr"/>
-            <a:r>
-              <a:rPr lang="en-US" altLang="zh-CN" sz="1400" b="1">
-                <a:latin typeface="Times New Roman" panose="02020603050405020304" charset="0"/>
-                <a:cs typeface="Times New Roman" panose="02020603050405020304" charset="0"/>
-              </a:rPr>
-              <a:t>d</a:t>
-            </a:r>
-            <a:endParaRPr lang="en-US" altLang="zh-CN" sz="1400" b="1">
-              <a:latin typeface="Times New Roman" panose="02020603050405020304" charset="0"/>
-              <a:cs typeface="Times New Roman" panose="02020603050405020304" charset="0"/>
             </a:endParaRPr>
           </a:p>
         </p:txBody>
@@ -3241,53 +3018,11 @@
 
 <file path=ppt/tags/tag1.xml><?xml version="1.0" encoding="utf-8"?>
 <p:tagLst xmlns:p="http://schemas.openxmlformats.org/presentationml/2006/main">
-  <p:tag name="KSO_WM_DIAGRAM_VIRTUALLY_FRAME" val="{&quot;height&quot;:396.8203149606299,&quot;left&quot;:5.878346456692913,&quot;top&quot;:19.499212598425196,&quot;width&quot;:553.4456692913386}"/>
+  <p:tag name="KSO_WM_DIAGRAM_VIRTUALLY_FRAME" val="{&quot;height&quot;:419.8974015748032,&quot;left&quot;:3.086220472440945,&quot;top&quot;:16.64314960629921,&quot;width&quot;:504.85173228346446}"/>
 </p:tagLst>
 </file>
 
 <file path=ppt/tags/tag2.xml><?xml version="1.0" encoding="utf-8"?>
-<p:tagLst xmlns:p="http://schemas.openxmlformats.org/presentationml/2006/main">
-  <p:tag name="KSO_WM_DIAGRAM_VIRTUALLY_FRAME" val="{&quot;height&quot;:396.8203149606299,&quot;left&quot;:5.878346456692913,&quot;top&quot;:19.499212598425196,&quot;width&quot;:553.4456692913386}"/>
-</p:tagLst>
-</file>
-
-<file path=ppt/tags/tag3.xml><?xml version="1.0" encoding="utf-8"?>
-<p:tagLst xmlns:p="http://schemas.openxmlformats.org/presentationml/2006/main">
-  <p:tag name="KSO_WM_DIAGRAM_VIRTUALLY_FRAME" val="{&quot;height&quot;:396.8203149606299,&quot;left&quot;:5.878346456692913,&quot;top&quot;:19.499212598425196,&quot;width&quot;:553.4456692913386}"/>
-</p:tagLst>
-</file>
-
-<file path=ppt/tags/tag4.xml><?xml version="1.0" encoding="utf-8"?>
-<p:tagLst xmlns:p="http://schemas.openxmlformats.org/presentationml/2006/main">
-  <p:tag name="KSO_WM_DIAGRAM_VIRTUALLY_FRAME" val="{&quot;height&quot;:396.8203149606299,&quot;left&quot;:5.878346456692913,&quot;top&quot;:19.499212598425196,&quot;width&quot;:553.4456692913386}"/>
-</p:tagLst>
-</file>
-
-<file path=ppt/tags/tag5.xml><?xml version="1.0" encoding="utf-8"?>
-<p:tagLst xmlns:p="http://schemas.openxmlformats.org/presentationml/2006/main">
-  <p:tag name="KSO_WM_DIAGRAM_VIRTUALLY_FRAME" val="{&quot;height&quot;:396.8203149606299,&quot;left&quot;:5.878346456692913,&quot;top&quot;:19.499212598425196,&quot;width&quot;:553.4456692913386}"/>
-</p:tagLst>
-</file>
-
-<file path=ppt/tags/tag6.xml><?xml version="1.0" encoding="utf-8"?>
-<p:tagLst xmlns:p="http://schemas.openxmlformats.org/presentationml/2006/main">
-  <p:tag name="KSO_WM_DIAGRAM_VIRTUALLY_FRAME" val="{&quot;height&quot;:396.8203149606299,&quot;left&quot;:5.878346456692913,&quot;top&quot;:19.499212598425196,&quot;width&quot;:553.4456692913386}"/>
-</p:tagLst>
-</file>
-
-<file path=ppt/tags/tag7.xml><?xml version="1.0" encoding="utf-8"?>
-<p:tagLst xmlns:p="http://schemas.openxmlformats.org/presentationml/2006/main">
-  <p:tag name="KSO_WM_DIAGRAM_VIRTUALLY_FRAME" val="{&quot;height&quot;:396.8203149606299,&quot;left&quot;:5.878346456692913,&quot;top&quot;:19.499212598425196,&quot;width&quot;:553.4456692913386}"/>
-</p:tagLst>
-</file>
-
-<file path=ppt/tags/tag8.xml><?xml version="1.0" encoding="utf-8"?>
-<p:tagLst xmlns:p="http://schemas.openxmlformats.org/presentationml/2006/main">
-  <p:tag name="KSO_WM_DIAGRAM_VIRTUALLY_FRAME" val="{&quot;height&quot;:396.8203149606299,&quot;left&quot;:5.878346456692913,&quot;top&quot;:19.499212598425196,&quot;width&quot;:553.4456692913386}"/>
-</p:tagLst>
-</file>
-
-<file path=ppt/tags/tag9.xml><?xml version="1.0" encoding="utf-8"?>
 <p:tagLst xmlns:p="http://schemas.openxmlformats.org/presentationml/2006/main">
   <p:tag name="commondata" val="eyJoZGlkIjoiMWU4NTYwNDRjODQ2YTFjZWMxNzg1ZTdjYzJmZWI4OGQifQ=="/>
 </p:tagLst>
